--- a/алгор/лекции/Алг Лекция 5.pptx
+++ b/алгор/лекции/Алг Лекция 5.pptx
@@ -298,7 +298,8 @@
           <a:p>
             <a:fld id="{EF908188-2B33-40C9-98B6-BF047C517A6E}" type="datetimeFigureOut">
               <a:rPr lang="ru-RU" smtClean="0"/>
-              <a:t>27.09.2026</a:t>
+              <a:pPr/>
+              <a:t>13.10.2026</a:t>
             </a:fld>
             <a:endParaRPr lang="ru-RU"/>
           </a:p>
@@ -340,6 +341,7 @@
           <a:p>
             <a:fld id="{FE29DC97-5F9F-4CA2-B809-3A6E203CA0E7}" type="slidenum">
               <a:rPr lang="ru-RU" smtClean="0"/>
+              <a:pPr/>
               <a:t>‹#›</a:t>
             </a:fld>
             <a:endParaRPr lang="ru-RU"/>
@@ -463,7 +465,8 @@
           <a:p>
             <a:fld id="{EF908188-2B33-40C9-98B6-BF047C517A6E}" type="datetimeFigureOut">
               <a:rPr lang="ru-RU" smtClean="0"/>
-              <a:t>27.09.2026</a:t>
+              <a:pPr/>
+              <a:t>13.10.2026</a:t>
             </a:fld>
             <a:endParaRPr lang="ru-RU"/>
           </a:p>
@@ -505,6 +508,7 @@
           <a:p>
             <a:fld id="{FE29DC97-5F9F-4CA2-B809-3A6E203CA0E7}" type="slidenum">
               <a:rPr lang="ru-RU" smtClean="0"/>
+              <a:pPr/>
               <a:t>‹#›</a:t>
             </a:fld>
             <a:endParaRPr lang="ru-RU"/>
@@ -638,7 +642,8 @@
           <a:p>
             <a:fld id="{EF908188-2B33-40C9-98B6-BF047C517A6E}" type="datetimeFigureOut">
               <a:rPr lang="ru-RU" smtClean="0"/>
-              <a:t>27.09.2026</a:t>
+              <a:pPr/>
+              <a:t>13.10.2026</a:t>
             </a:fld>
             <a:endParaRPr lang="ru-RU"/>
           </a:p>
@@ -680,6 +685,7 @@
           <a:p>
             <a:fld id="{FE29DC97-5F9F-4CA2-B809-3A6E203CA0E7}" type="slidenum">
               <a:rPr lang="ru-RU" smtClean="0"/>
+              <a:pPr/>
               <a:t>‹#›</a:t>
             </a:fld>
             <a:endParaRPr lang="ru-RU"/>
@@ -803,7 +809,8 @@
           <a:p>
             <a:fld id="{EF908188-2B33-40C9-98B6-BF047C517A6E}" type="datetimeFigureOut">
               <a:rPr lang="ru-RU" smtClean="0"/>
-              <a:t>27.09.2026</a:t>
+              <a:pPr/>
+              <a:t>13.10.2026</a:t>
             </a:fld>
             <a:endParaRPr lang="ru-RU"/>
           </a:p>
@@ -845,6 +852,7 @@
           <a:p>
             <a:fld id="{FE29DC97-5F9F-4CA2-B809-3A6E203CA0E7}" type="slidenum">
               <a:rPr lang="ru-RU" smtClean="0"/>
+              <a:pPr/>
               <a:t>‹#›</a:t>
             </a:fld>
             <a:endParaRPr lang="ru-RU"/>
@@ -1044,7 +1052,8 @@
           <a:p>
             <a:fld id="{EF908188-2B33-40C9-98B6-BF047C517A6E}" type="datetimeFigureOut">
               <a:rPr lang="ru-RU" smtClean="0"/>
-              <a:t>27.09.2026</a:t>
+              <a:pPr/>
+              <a:t>13.10.2026</a:t>
             </a:fld>
             <a:endParaRPr lang="ru-RU"/>
           </a:p>
@@ -1086,6 +1095,7 @@
           <a:p>
             <a:fld id="{FE29DC97-5F9F-4CA2-B809-3A6E203CA0E7}" type="slidenum">
               <a:rPr lang="ru-RU" smtClean="0"/>
+              <a:pPr/>
               <a:t>‹#›</a:t>
             </a:fld>
             <a:endParaRPr lang="ru-RU"/>
@@ -1327,7 +1337,8 @@
           <a:p>
             <a:fld id="{EF908188-2B33-40C9-98B6-BF047C517A6E}" type="datetimeFigureOut">
               <a:rPr lang="ru-RU" smtClean="0"/>
-              <a:t>27.09.2026</a:t>
+              <a:pPr/>
+              <a:t>13.10.2026</a:t>
             </a:fld>
             <a:endParaRPr lang="ru-RU"/>
           </a:p>
@@ -1369,6 +1380,7 @@
           <a:p>
             <a:fld id="{FE29DC97-5F9F-4CA2-B809-3A6E203CA0E7}" type="slidenum">
               <a:rPr lang="ru-RU" smtClean="0"/>
+              <a:pPr/>
               <a:t>‹#›</a:t>
             </a:fld>
             <a:endParaRPr lang="ru-RU"/>
@@ -1744,7 +1756,8 @@
           <a:p>
             <a:fld id="{EF908188-2B33-40C9-98B6-BF047C517A6E}" type="datetimeFigureOut">
               <a:rPr lang="ru-RU" smtClean="0"/>
-              <a:t>27.09.2026</a:t>
+              <a:pPr/>
+              <a:t>13.10.2026</a:t>
             </a:fld>
             <a:endParaRPr lang="ru-RU"/>
           </a:p>
@@ -1786,6 +1799,7 @@
           <a:p>
             <a:fld id="{FE29DC97-5F9F-4CA2-B809-3A6E203CA0E7}" type="slidenum">
               <a:rPr lang="ru-RU" smtClean="0"/>
+              <a:pPr/>
               <a:t>‹#›</a:t>
             </a:fld>
             <a:endParaRPr lang="ru-RU"/>
@@ -1857,7 +1871,8 @@
           <a:p>
             <a:fld id="{EF908188-2B33-40C9-98B6-BF047C517A6E}" type="datetimeFigureOut">
               <a:rPr lang="ru-RU" smtClean="0"/>
-              <a:t>27.09.2026</a:t>
+              <a:pPr/>
+              <a:t>13.10.2026</a:t>
             </a:fld>
             <a:endParaRPr lang="ru-RU"/>
           </a:p>
@@ -1899,6 +1914,7 @@
           <a:p>
             <a:fld id="{FE29DC97-5F9F-4CA2-B809-3A6E203CA0E7}" type="slidenum">
               <a:rPr lang="ru-RU" smtClean="0"/>
+              <a:pPr/>
               <a:t>‹#›</a:t>
             </a:fld>
             <a:endParaRPr lang="ru-RU"/>
@@ -1947,7 +1963,8 @@
           <a:p>
             <a:fld id="{EF908188-2B33-40C9-98B6-BF047C517A6E}" type="datetimeFigureOut">
               <a:rPr lang="ru-RU" smtClean="0"/>
-              <a:t>27.09.2026</a:t>
+              <a:pPr/>
+              <a:t>13.10.2026</a:t>
             </a:fld>
             <a:endParaRPr lang="ru-RU"/>
           </a:p>
@@ -1989,6 +2006,7 @@
           <a:p>
             <a:fld id="{FE29DC97-5F9F-4CA2-B809-3A6E203CA0E7}" type="slidenum">
               <a:rPr lang="ru-RU" smtClean="0"/>
+              <a:pPr/>
               <a:t>‹#›</a:t>
             </a:fld>
             <a:endParaRPr lang="ru-RU"/>
@@ -2219,7 +2237,8 @@
           <a:p>
             <a:fld id="{EF908188-2B33-40C9-98B6-BF047C517A6E}" type="datetimeFigureOut">
               <a:rPr lang="ru-RU" smtClean="0"/>
-              <a:t>27.09.2026</a:t>
+              <a:pPr/>
+              <a:t>13.10.2026</a:t>
             </a:fld>
             <a:endParaRPr lang="ru-RU"/>
           </a:p>
@@ -2261,6 +2280,7 @@
           <a:p>
             <a:fld id="{FE29DC97-5F9F-4CA2-B809-3A6E203CA0E7}" type="slidenum">
               <a:rPr lang="ru-RU" smtClean="0"/>
+              <a:pPr/>
               <a:t>‹#›</a:t>
             </a:fld>
             <a:endParaRPr lang="ru-RU"/>
@@ -2467,7 +2487,8 @@
           <a:p>
             <a:fld id="{EF908188-2B33-40C9-98B6-BF047C517A6E}" type="datetimeFigureOut">
               <a:rPr lang="ru-RU" smtClean="0"/>
-              <a:t>27.09.2026</a:t>
+              <a:pPr/>
+              <a:t>13.10.2026</a:t>
             </a:fld>
             <a:endParaRPr lang="ru-RU"/>
           </a:p>
@@ -2509,6 +2530,7 @@
           <a:p>
             <a:fld id="{FE29DC97-5F9F-4CA2-B809-3A6E203CA0E7}" type="slidenum">
               <a:rPr lang="ru-RU" smtClean="0"/>
+              <a:pPr/>
               <a:t>‹#›</a:t>
             </a:fld>
             <a:endParaRPr lang="ru-RU"/>
@@ -2675,7 +2697,8 @@
           <a:p>
             <a:fld id="{EF908188-2B33-40C9-98B6-BF047C517A6E}" type="datetimeFigureOut">
               <a:rPr lang="ru-RU" smtClean="0"/>
-              <a:t>27.09.2026</a:t>
+              <a:pPr/>
+              <a:t>13.10.2026</a:t>
             </a:fld>
             <a:endParaRPr lang="ru-RU"/>
           </a:p>
@@ -2753,6 +2776,7 @@
           <a:p>
             <a:fld id="{FE29DC97-5F9F-4CA2-B809-3A6E203CA0E7}" type="slidenum">
               <a:rPr lang="ru-RU" smtClean="0"/>
+              <a:pPr/>
               <a:t>‹#›</a:t>
             </a:fld>
             <a:endParaRPr lang="ru-RU"/>
@@ -3895,7 +3919,7 @@
         <p:spPr>
           <a:xfrm>
             <a:off x="0" y="1000108"/>
-            <a:ext cx="9144000" cy="1938992"/>
+            <a:ext cx="9144000" cy="3046988"/>
           </a:xfrm>
           <a:prstGeom prst="rect">
             <a:avLst/>
@@ -3941,9 +3965,46 @@
                 <a:latin typeface="Times New Roman" pitchFamily="18" charset="0"/>
                 <a:cs typeface="Times New Roman" pitchFamily="18" charset="0"/>
               </a:rPr>
-              <a:t> — это упорядоченная и неизменяемая коллекция элементов, которые могут быть разных типов. Проще говоря, это последовательность, которую после создания нельзя изменить: нельзя добавить, удалить или заменить элементы.</a:t>
-            </a:r>
-            <a:endParaRPr lang="ru-RU" sz="2400" dirty="0">
+              <a:t> — это упорядоченная и неизменяемая коллекция элементов, которые могут быть разных типов. Проще говоря, это последовательность, которую после создания нельзя изменить: нельзя добавить, удалить или заменить элементы</a:t>
+            </a:r>
+            <a:r>
+              <a:rPr lang="ru-RU" sz="2400" dirty="0" smtClean="0">
+                <a:latin typeface="Times New Roman" pitchFamily="18" charset="0"/>
+                <a:cs typeface="Times New Roman" pitchFamily="18" charset="0"/>
+              </a:rPr>
+              <a:t>.</a:t>
+            </a:r>
+            <a:endParaRPr lang="en-US" sz="2400" dirty="0" smtClean="0">
+              <a:latin typeface="Times New Roman" pitchFamily="18" charset="0"/>
+              <a:cs typeface="Times New Roman" pitchFamily="18" charset="0"/>
+            </a:endParaRPr>
+          </a:p>
+          <a:p>
+            <a:pPr algn="just"/>
+            <a:endParaRPr lang="en-US" sz="2400" dirty="0" smtClean="0">
+              <a:latin typeface="Times New Roman" pitchFamily="18" charset="0"/>
+              <a:cs typeface="Times New Roman" pitchFamily="18" charset="0"/>
+            </a:endParaRPr>
+          </a:p>
+          <a:p>
+            <a:pPr algn="ctr"/>
+            <a:r>
+              <a:rPr lang="en-US" sz="2400" b="1" dirty="0" smtClean="0">
+                <a:latin typeface="Times New Roman" pitchFamily="18" charset="0"/>
+                <a:cs typeface="Times New Roman" pitchFamily="18" charset="0"/>
+                <a:hlinkClick r:id="rId2"/>
+              </a:rPr>
+              <a:t>https://</a:t>
+            </a:r>
+            <a:r>
+              <a:rPr lang="en-US" sz="2400" b="1" dirty="0" smtClean="0">
+                <a:latin typeface="Times New Roman" pitchFamily="18" charset="0"/>
+                <a:cs typeface="Times New Roman" pitchFamily="18" charset="0"/>
+                <a:hlinkClick r:id="rId2"/>
+              </a:rPr>
+              <a:t>python-academy.org/ru/guide/tuples?ysclid=mv73yyh7fw691433762</a:t>
+            </a:r>
+            <a:endParaRPr lang="en-US" sz="2400" b="1" dirty="0" smtClean="0">
               <a:latin typeface="Times New Roman" pitchFamily="18" charset="0"/>
               <a:cs typeface="Times New Roman" pitchFamily="18" charset="0"/>
             </a:endParaRPr>
@@ -4063,39 +4124,6 @@
           </a:p>
         </p:txBody>
       </p:sp>
-      <p:pic>
-        <p:nvPicPr>
-          <p:cNvPr id="2051" name="Picture 3"/>
-          <p:cNvPicPr>
-            <a:picLocks noChangeAspect="1" noChangeArrowheads="1"/>
-          </p:cNvPicPr>
-          <p:nvPr/>
-        </p:nvPicPr>
-        <p:blipFill>
-          <a:blip r:embed="rId2"/>
-          <a:srcRect/>
-          <a:stretch>
-            <a:fillRect/>
-          </a:stretch>
-        </p:blipFill>
-        <p:spPr bwMode="auto">
-          <a:xfrm>
-            <a:off x="1714480" y="2990269"/>
-            <a:ext cx="5357850" cy="3867732"/>
-          </a:xfrm>
-          <a:prstGeom prst="rect">
-            <a:avLst/>
-          </a:prstGeom>
-          <a:noFill/>
-          <a:ln w="9525">
-            <a:noFill/>
-            <a:miter lim="800000"/>
-            <a:headEnd/>
-            <a:tailEnd/>
-          </a:ln>
-          <a:effectLst/>
-        </p:spPr>
-      </p:pic>
     </p:spTree>
   </p:cSld>
   <p:clrMapOvr>
